--- a/授课课件/数组·复杂度·结构体·函数.pptx
+++ b/授课课件/数组·复杂度·结构体·函数.pptx
@@ -8,6 +8,9 @@
   <p:notesMasterIdLst>
     <p:notesMasterId r:id="rId5"/>
   </p:notesMasterIdLst>
+  <p:handoutMasterIdLst>
+    <p:handoutMasterId r:id="rId20"/>
+  </p:handoutMasterIdLst>
   <p:sldIdLst>
     <p:sldId id="256" r:id="rId4"/>
     <p:sldId id="257" r:id="rId6"/>
@@ -273,6 +276,164 @@
     </p:ext>
   </p:extLst>
 </p:presentation>
+</file>
+
+<file path=ppt/handoutMasters/handoutMaster1.xml><?xml version="1.0" encoding="utf-8"?>
+<p:handoutMaster xmlns:a="http://schemas.openxmlformats.org/drawingml/2006/main" xmlns:r="http://schemas.openxmlformats.org/officeDocument/2006/relationships" xmlns:p="http://schemas.openxmlformats.org/presentationml/2006/main">
+  <p:cSld>
+    <p:bg>
+      <p:bgRef idx="1001">
+        <a:schemeClr val="bg1"/>
+      </p:bgRef>
+    </p:bg>
+    <p:spTree>
+      <p:nvGrpSpPr>
+        <p:cNvPr id="1" name=""/>
+        <p:cNvGrpSpPr/>
+        <p:nvPr/>
+      </p:nvGrpSpPr>
+      <p:grpSpPr>
+        <a:xfrm>
+          <a:off x="0" y="0"/>
+          <a:ext cx="0" cy="0"/>
+          <a:chOff x="0" y="0"/>
+          <a:chExt cx="0" cy="0"/>
+        </a:xfrm>
+      </p:grpSpPr>
+      <p:sp>
+        <p:nvSpPr>
+          <p:cNvPr id="2" name="页眉占位符 1"/>
+          <p:cNvSpPr>
+            <a:spLocks noGrp="1"/>
+          </p:cNvSpPr>
+          <p:nvPr>
+            <p:ph type="hdr" sz="quarter"/>
+          </p:nvPr>
+        </p:nvSpPr>
+        <p:spPr>
+          <a:xfrm>
+            <a:off x="0" y="0"/>
+            <a:ext cx="2971800" cy="458788"/>
+          </a:xfrm>
+          <a:prstGeom prst="rect">
+            <a:avLst/>
+          </a:prstGeom>
+        </p:spPr>
+        <p:txBody>
+          <a:bodyPr vert="horz" lIns="91440" tIns="45720" rIns="91440" bIns="45720" rtlCol="0"/>
+          <a:lstStyle>
+            <a:lvl1pPr algn="l">
+              <a:defRPr sz="1200"/>
+            </a:lvl1pPr>
+          </a:lstStyle>
+          <a:p>
+            <a:endParaRPr lang="zh-CN" altLang="en-US"/>
+          </a:p>
+        </p:txBody>
+      </p:sp>
+      <p:sp>
+        <p:nvSpPr>
+          <p:cNvPr id="3" name="日期占位符 2"/>
+          <p:cNvSpPr>
+            <a:spLocks noGrp="1"/>
+          </p:cNvSpPr>
+          <p:nvPr>
+            <p:ph type="dt" sz="quarter" idx="1"/>
+          </p:nvPr>
+        </p:nvSpPr>
+        <p:spPr>
+          <a:xfrm>
+            <a:off x="3884613" y="0"/>
+            <a:ext cx="2971800" cy="458788"/>
+          </a:xfrm>
+          <a:prstGeom prst="rect">
+            <a:avLst/>
+          </a:prstGeom>
+        </p:spPr>
+        <p:txBody>
+          <a:bodyPr vert="horz" lIns="91440" tIns="45720" rIns="91440" bIns="45720" rtlCol="0"/>
+          <a:lstStyle>
+            <a:lvl1pPr algn="r">
+              <a:defRPr sz="1200"/>
+            </a:lvl1pPr>
+          </a:lstStyle>
+          <a:p>
+            <a:fld id="{0F9B84EA-7D68-4D60-9CB1-D50884785D1C}" type="datetimeFigureOut">
+              <a:rPr lang="zh-CN" altLang="en-US" smtClean="0"/>
+            </a:fld>
+            <a:endParaRPr lang="zh-CN" altLang="en-US"/>
+          </a:p>
+        </p:txBody>
+      </p:sp>
+      <p:sp>
+        <p:nvSpPr>
+          <p:cNvPr id="4" name="页脚占位符 3"/>
+          <p:cNvSpPr>
+            <a:spLocks noGrp="1"/>
+          </p:cNvSpPr>
+          <p:nvPr>
+            <p:ph type="ftr" sz="quarter" idx="2"/>
+          </p:nvPr>
+        </p:nvSpPr>
+        <p:spPr>
+          <a:xfrm>
+            <a:off x="0" y="8685213"/>
+            <a:ext cx="2971800" cy="458787"/>
+          </a:xfrm>
+          <a:prstGeom prst="rect">
+            <a:avLst/>
+          </a:prstGeom>
+        </p:spPr>
+        <p:txBody>
+          <a:bodyPr vert="horz" lIns="91440" tIns="45720" rIns="91440" bIns="45720" rtlCol="0" anchor="b"/>
+          <a:lstStyle>
+            <a:lvl1pPr algn="l">
+              <a:defRPr sz="1200"/>
+            </a:lvl1pPr>
+          </a:lstStyle>
+          <a:p>
+            <a:endParaRPr lang="zh-CN" altLang="en-US"/>
+          </a:p>
+        </p:txBody>
+      </p:sp>
+      <p:sp>
+        <p:nvSpPr>
+          <p:cNvPr id="5" name="灯片编号占位符 4"/>
+          <p:cNvSpPr>
+            <a:spLocks noGrp="1"/>
+          </p:cNvSpPr>
+          <p:nvPr>
+            <p:ph type="sldNum" sz="quarter" idx="3"/>
+          </p:nvPr>
+        </p:nvSpPr>
+        <p:spPr>
+          <a:xfrm>
+            <a:off x="3884613" y="8685213"/>
+            <a:ext cx="2971800" cy="458787"/>
+          </a:xfrm>
+          <a:prstGeom prst="rect">
+            <a:avLst/>
+          </a:prstGeom>
+        </p:spPr>
+        <p:txBody>
+          <a:bodyPr vert="horz" lIns="91440" tIns="45720" rIns="91440" bIns="45720" rtlCol="0" anchor="b"/>
+          <a:lstStyle>
+            <a:lvl1pPr algn="r">
+              <a:defRPr sz="1200"/>
+            </a:lvl1pPr>
+          </a:lstStyle>
+          <a:p>
+            <a:fld id="{8D4E0FC9-F1F8-4FAE-9988-3BA365CFD46F}" type="slidenum">
+              <a:rPr lang="zh-CN" altLang="en-US" smtClean="0"/>
+            </a:fld>
+            <a:endParaRPr lang="zh-CN" altLang="en-US"/>
+          </a:p>
+        </p:txBody>
+      </p:sp>
+    </p:spTree>
+  </p:cSld>
+  <p:clrMap bg1="lt1" tx1="dk1" bg2="lt2" tx2="dk2" accent1="accent1" accent2="accent2" accent3="accent3" accent4="accent4" accent5="accent5" accent6="accent6" hlink="hlink" folHlink="folHlink"/>
+</p:handoutMaster>
 </file>
 
 <file path=ppt/notesMasters/notesMaster1.xml><?xml version="1.0" encoding="utf-8"?>
@@ -20668,10 +20829,10 @@
                 <a:solidFill>
                   <a:srgbClr val="A7F3D0"/>
                 </a:solidFill>
-                <a:latin typeface="Roboto Mono"/>
-                <a:ea typeface="Roboto Mono"/>
-                <a:cs typeface="Roboto Mono"/>
-                <a:sym typeface="Roboto Mono"/>
+                <a:latin typeface="Roboto" panose="02000000000000000000" charset="0"/>
+                <a:ea typeface="Roboto" panose="02000000000000000000" charset="0"/>
+                <a:cs typeface="Roboto" panose="02000000000000000000" charset="0"/>
+                <a:sym typeface="Roboto" panose="02000000000000000000" charset="0"/>
               </a:rPr>
               <a:t>// 声明（原型，main前）：仅签名，加分号</a:t>
             </a:r>
@@ -20680,10 +20841,10 @@
                 <a:solidFill>
                   <a:srgbClr val="1F2329"/>
                 </a:solidFill>
-                <a:latin typeface="Roboto Mono"/>
-                <a:ea typeface="Roboto Mono"/>
-                <a:cs typeface="Roboto Mono"/>
-                <a:sym typeface="Roboto Mono"/>
+                <a:latin typeface="Roboto" panose="02000000000000000000" charset="0"/>
+                <a:ea typeface="Roboto" panose="02000000000000000000" charset="0"/>
+                <a:cs typeface="Roboto" panose="02000000000000000000" charset="0"/>
+                <a:sym typeface="Roboto" panose="02000000000000000000" charset="0"/>
               </a:rPr>
             </a:br>
             <a:r>
@@ -20691,10 +20852,10 @@
                 <a:solidFill>
                   <a:srgbClr val="FFFFFF"/>
                 </a:solidFill>
-                <a:latin typeface="Roboto Mono"/>
-                <a:ea typeface="Roboto Mono"/>
-                <a:cs typeface="Roboto Mono"/>
-                <a:sym typeface="Roboto Mono"/>
+                <a:latin typeface="Roboto" panose="02000000000000000000" charset="0"/>
+                <a:ea typeface="Roboto" panose="02000000000000000000" charset="0"/>
+                <a:cs typeface="Roboto" panose="02000000000000000000" charset="0"/>
+                <a:sym typeface="Roboto" panose="02000000000000000000" charset="0"/>
               </a:rPr>
               <a:t>i</a:t>
             </a:r>
@@ -20705,8 +20866,8 @@
                 </a:solidFill>
                 <a:latin typeface="微软雅黑 Light" panose="020B0502040204020203" charset="-122"/>
                 <a:ea typeface="微软雅黑 Light" panose="020B0502040204020203" charset="-122"/>
-                <a:cs typeface="Roboto Mono"/>
-                <a:sym typeface="Roboto Mono"/>
+                <a:cs typeface="Roboto" panose="02000000000000000000" charset="0"/>
+                <a:sym typeface="Roboto" panose="02000000000000000000" charset="0"/>
               </a:rPr>
               <a:t>nt add(int a, int b);</a:t>
             </a:r>
@@ -20717,8 +20878,8 @@
                 </a:solidFill>
                 <a:latin typeface="微软雅黑 Light" panose="020B0502040204020203" charset="-122"/>
                 <a:ea typeface="微软雅黑 Light" panose="020B0502040204020203" charset="-122"/>
-                <a:cs typeface="Roboto Mono"/>
-                <a:sym typeface="Roboto Mono"/>
+                <a:cs typeface="Roboto" panose="02000000000000000000" charset="0"/>
+                <a:sym typeface="Roboto" panose="02000000000000000000" charset="0"/>
               </a:rPr>
             </a:br>
             <a:r>
@@ -20726,10 +20887,10 @@
                 <a:solidFill>
                   <a:srgbClr val="A7F3D0"/>
                 </a:solidFill>
-                <a:latin typeface="Roboto Mono"/>
-                <a:ea typeface="Roboto Mono"/>
-                <a:cs typeface="Roboto Mono"/>
-                <a:sym typeface="Roboto Mono"/>
+                <a:latin typeface="Roboto" panose="02000000000000000000" charset="0"/>
+                <a:ea typeface="Roboto" panose="02000000000000000000" charset="0"/>
+                <a:cs typeface="Roboto" panose="02000000000000000000" charset="0"/>
+                <a:sym typeface="Roboto" panose="02000000000000000000" charset="0"/>
               </a:rPr>
               <a:t>// 定义（实现，main后）：有函数体，无分号</a:t>
             </a:r>
@@ -20738,10 +20899,10 @@
                 <a:solidFill>
                   <a:srgbClr val="1F2329"/>
                 </a:solidFill>
-                <a:latin typeface="Roboto Mono"/>
-                <a:ea typeface="Roboto Mono"/>
-                <a:cs typeface="Roboto Mono"/>
-                <a:sym typeface="Roboto Mono"/>
+                <a:latin typeface="Roboto" panose="02000000000000000000" charset="0"/>
+                <a:ea typeface="Roboto" panose="02000000000000000000" charset="0"/>
+                <a:cs typeface="Roboto" panose="02000000000000000000" charset="0"/>
+                <a:sym typeface="Roboto" panose="02000000000000000000" charset="0"/>
               </a:rPr>
             </a:br>
             <a:r>
@@ -20751,8 +20912,8 @@
                 </a:solidFill>
                 <a:latin typeface="微软雅黑 Light" panose="020B0502040204020203" charset="-122"/>
                 <a:ea typeface="微软雅黑 Light" panose="020B0502040204020203" charset="-122"/>
-                <a:cs typeface="Roboto Mono"/>
-                <a:sym typeface="Roboto Mono"/>
+                <a:cs typeface="Roboto" panose="02000000000000000000" charset="0"/>
+                <a:sym typeface="Roboto" panose="02000000000000000000" charset="0"/>
               </a:rPr>
               <a:t>int add(int a, int b) { return a + b; }</a:t>
             </a:r>
@@ -20762,7 +20923,7 @@
               </a:solidFill>
               <a:latin typeface="微软雅黑 Light" panose="020B0502040204020203" charset="-122"/>
               <a:ea typeface="微软雅黑 Light" panose="020B0502040204020203" charset="-122"/>
-              <a:cs typeface="Roboto Mono"/>
+              <a:cs typeface="Roboto" panose="02000000000000000000" charset="0"/>
             </a:endParaRPr>
           </a:p>
         </p:txBody>
@@ -20975,10 +21136,10 @@
                 <a:solidFill>
                   <a:srgbClr val="A7F3D0"/>
                 </a:solidFill>
-                <a:latin typeface="Roboto Mono"/>
-                <a:ea typeface="Roboto Mono"/>
-                <a:cs typeface="Roboto Mono"/>
-                <a:sym typeface="Roboto Mono"/>
+                <a:latin typeface="Roboto" panose="02000000000000000000" charset="0"/>
+                <a:ea typeface="Roboto" panose="02000000000000000000" charset="0"/>
+                <a:cs typeface="Roboto" panose="02000000000000000000" charset="0"/>
+                <a:sym typeface="Roboto" panose="02000000000000000000" charset="0"/>
               </a:rPr>
               <a:t>// void类型：不返回数据，仅执行动作</a:t>
             </a:r>
@@ -20987,10 +21148,10 @@
                 <a:solidFill>
                   <a:srgbClr val="1F2329"/>
                 </a:solidFill>
-                <a:latin typeface="Roboto Mono"/>
-                <a:ea typeface="Roboto Mono"/>
-                <a:cs typeface="Roboto Mono"/>
-                <a:sym typeface="Roboto Mono"/>
+                <a:latin typeface="Roboto" panose="02000000000000000000" charset="0"/>
+                <a:ea typeface="Roboto" panose="02000000000000000000" charset="0"/>
+                <a:cs typeface="Roboto" panose="02000000000000000000" charset="0"/>
+                <a:sym typeface="Roboto" panose="02000000000000000000" charset="0"/>
               </a:rPr>
             </a:br>
             <a:r>
@@ -20998,10 +21159,10 @@
                 <a:solidFill>
                   <a:srgbClr val="FFFFFF"/>
                 </a:solidFill>
-                <a:latin typeface="Roboto Mono"/>
-                <a:ea typeface="Roboto Mono"/>
-                <a:cs typeface="Roboto Mono"/>
-                <a:sym typeface="Roboto Mono"/>
+                <a:latin typeface="Roboto" panose="02000000000000000000" charset="0"/>
+                <a:ea typeface="Roboto" panose="02000000000000000000" charset="0"/>
+                <a:cs typeface="Roboto" panose="02000000000000000000" charset="0"/>
+                <a:sym typeface="Roboto" panose="02000000000000000000" charset="0"/>
               </a:rPr>
               <a:t>vo</a:t>
             </a:r>
@@ -21012,8 +21173,8 @@
                 </a:solidFill>
                 <a:latin typeface="微软雅黑 Light" panose="020B0502040204020203" charset="-122"/>
                 <a:ea typeface="微软雅黑 Light" panose="020B0502040204020203" charset="-122"/>
-                <a:cs typeface="Roboto Mono"/>
-                <a:sym typeface="Roboto Mono"/>
+                <a:cs typeface="Roboto" panose="02000000000000000000" charset="0"/>
+                <a:sym typeface="Roboto" panose="02000000000000000000" charset="0"/>
               </a:rPr>
               <a:t>id printHello() {</a:t>
             </a:r>
@@ -21024,8 +21185,8 @@
                 </a:solidFill>
                 <a:latin typeface="微软雅黑 Light" panose="020B0502040204020203" charset="-122"/>
                 <a:ea typeface="微软雅黑 Light" panose="020B0502040204020203" charset="-122"/>
-                <a:cs typeface="Roboto Mono"/>
-                <a:sym typeface="Roboto Mono"/>
+                <a:cs typeface="Roboto" panose="02000000000000000000" charset="0"/>
+                <a:sym typeface="Roboto" panose="02000000000000000000" charset="0"/>
               </a:rPr>
             </a:br>
             <a:r>
@@ -21035,8 +21196,8 @@
                 </a:solidFill>
                 <a:latin typeface="微软雅黑 Light" panose="020B0502040204020203" charset="-122"/>
                 <a:ea typeface="微软雅黑 Light" panose="020B0502040204020203" charset="-122"/>
-                <a:cs typeface="Roboto Mono"/>
-                <a:sym typeface="Roboto Mono"/>
+                <a:cs typeface="Roboto" panose="02000000000000000000" charset="0"/>
+                <a:sym typeface="Roboto" panose="02000000000000000000" charset="0"/>
               </a:rPr>
               <a:t>cout &lt;&lt; "Hello, Function!" &lt;&lt; endl;</a:t>
             </a:r>
@@ -21047,8 +21208,8 @@
                 </a:solidFill>
                 <a:latin typeface="微软雅黑 Light" panose="020B0502040204020203" charset="-122"/>
                 <a:ea typeface="微软雅黑 Light" panose="020B0502040204020203" charset="-122"/>
-                <a:cs typeface="Roboto Mono"/>
-                <a:sym typeface="Roboto Mono"/>
+                <a:cs typeface="Roboto" panose="02000000000000000000" charset="0"/>
+                <a:sym typeface="Roboto" panose="02000000000000000000" charset="0"/>
               </a:rPr>
             </a:br>
             <a:r>
@@ -21058,8 +21219,8 @@
                 </a:solidFill>
                 <a:latin typeface="微软雅黑 Light" panose="020B0502040204020203" charset="-122"/>
                 <a:ea typeface="微软雅黑 Light" panose="020B0502040204020203" charset="-122"/>
-                <a:cs typeface="Roboto Mono"/>
-                <a:sym typeface="Roboto Mono"/>
+                <a:cs typeface="Roboto" panose="02000000000000000000" charset="0"/>
+                <a:sym typeface="Roboto" panose="02000000000000000000" charset="0"/>
               </a:rPr>
               <a:t>}</a:t>
             </a:r>
@@ -25618,7 +25779,7 @@
                 <a:latin typeface="微软雅黑 Light" panose="020B0502040204020203" charset="-122"/>
                 <a:ea typeface="微软雅黑 Light" panose="020B0502040204020203" charset="-122"/>
                 <a:cs typeface="微软雅黑 Light" panose="020B0502040204020203" charset="-122"/>
-                <a:sym typeface="Roboto Mono"/>
+                <a:sym typeface="Roboto" panose="02000000000000000000" charset="0"/>
               </a:rPr>
               <a:t>int sum = 0; int arr[6] = {12,45,7,88,23,56};</a:t>
             </a:r>
@@ -25630,7 +25791,7 @@
                 <a:latin typeface="微软雅黑 Light" panose="020B0502040204020203" charset="-122"/>
                 <a:ea typeface="微软雅黑 Light" panose="020B0502040204020203" charset="-122"/>
                 <a:cs typeface="微软雅黑 Light" panose="020B0502040204020203" charset="-122"/>
-                <a:sym typeface="Roboto Mono"/>
+                <a:sym typeface="Roboto" panose="02000000000000000000" charset="0"/>
               </a:rPr>
             </a:br>
             <a:r>
@@ -25641,7 +25802,7 @@
                 <a:latin typeface="微软雅黑 Light" panose="020B0502040204020203" charset="-122"/>
                 <a:ea typeface="微软雅黑 Light" panose="020B0502040204020203" charset="-122"/>
                 <a:cs typeface="微软雅黑 Light" panose="020B0502040204020203" charset="-122"/>
-                <a:sym typeface="Roboto Mono"/>
+                <a:sym typeface="Roboto" panose="02000000000000000000" charset="0"/>
               </a:rPr>
               <a:t>for(int i = 0; i &lt; 6; i++) { sum += arr[i]; }</a:t>
             </a:r>
@@ -25653,7 +25814,7 @@
                 <a:latin typeface="微软雅黑 Light" panose="020B0502040204020203" charset="-122"/>
                 <a:ea typeface="微软雅黑 Light" panose="020B0502040204020203" charset="-122"/>
                 <a:cs typeface="微软雅黑 Light" panose="020B0502040204020203" charset="-122"/>
-                <a:sym typeface="Roboto Mono"/>
+                <a:sym typeface="Roboto" panose="02000000000000000000" charset="0"/>
               </a:rPr>
             </a:br>
             <a:r>
@@ -25664,7 +25825,7 @@
                 <a:latin typeface="微软雅黑 Light" panose="020B0502040204020203" charset="-122"/>
                 <a:ea typeface="微软雅黑 Light" panose="020B0502040204020203" charset="-122"/>
                 <a:cs typeface="微软雅黑 Light" panose="020B0502040204020203" charset="-122"/>
-                <a:sym typeface="Roboto Mono"/>
+                <a:sym typeface="Roboto" panose="02000000000000000000" charset="0"/>
               </a:rPr>
               <a:t>cout &lt;&lt; "数组总和 = " &lt;&lt; sum;</a:t>
             </a:r>
@@ -25856,7 +26017,7 @@
                 <a:latin typeface="微软雅黑 Light" panose="020B0502040204020203" charset="-122"/>
                 <a:ea typeface="微软雅黑 Light" panose="020B0502040204020203" charset="-122"/>
                 <a:cs typeface="微软雅黑 Light" panose="020B0502040204020203" charset="-122"/>
-                <a:sym typeface="Roboto Mono"/>
+                <a:sym typeface="Roboto" panose="02000000000000000000" charset="0"/>
               </a:rPr>
               <a:t>int max_v = arr[0], min_v = arr[0];</a:t>
             </a:r>
@@ -25868,7 +26029,7 @@
                 <a:latin typeface="微软雅黑 Light" panose="020B0502040204020203" charset="-122"/>
                 <a:ea typeface="微软雅黑 Light" panose="020B0502040204020203" charset="-122"/>
                 <a:cs typeface="微软雅黑 Light" panose="020B0502040204020203" charset="-122"/>
-                <a:sym typeface="Roboto Mono"/>
+                <a:sym typeface="Roboto" panose="02000000000000000000" charset="0"/>
               </a:rPr>
             </a:br>
             <a:r>
@@ -25879,7 +26040,7 @@
                 <a:latin typeface="微软雅黑 Light" panose="020B0502040204020203" charset="-122"/>
                 <a:ea typeface="微软雅黑 Light" panose="020B0502040204020203" charset="-122"/>
                 <a:cs typeface="微软雅黑 Light" panose="020B0502040204020203" charset="-122"/>
-                <a:sym typeface="Roboto Mono"/>
+                <a:sym typeface="Roboto" panose="02000000000000000000" charset="0"/>
               </a:rPr>
               <a:t>for(int i = 1; i &lt; 6; i++) {</a:t>
             </a:r>
@@ -25891,7 +26052,7 @@
                 <a:latin typeface="微软雅黑 Light" panose="020B0502040204020203" charset="-122"/>
                 <a:ea typeface="微软雅黑 Light" panose="020B0502040204020203" charset="-122"/>
                 <a:cs typeface="微软雅黑 Light" panose="020B0502040204020203" charset="-122"/>
-                <a:sym typeface="Roboto Mono"/>
+                <a:sym typeface="Roboto" panose="02000000000000000000" charset="0"/>
               </a:rPr>
             </a:br>
             <a:r>
@@ -25902,7 +26063,7 @@
                 <a:latin typeface="微软雅黑 Light" panose="020B0502040204020203" charset="-122"/>
                 <a:ea typeface="微软雅黑 Light" panose="020B0502040204020203" charset="-122"/>
                 <a:cs typeface="微软雅黑 Light" panose="020B0502040204020203" charset="-122"/>
-                <a:sym typeface="Roboto Mono"/>
+                <a:sym typeface="Roboto" panose="02000000000000000000" charset="0"/>
               </a:rPr>
               <a:t>if(arr[i] &gt; max_v) max_v = arr[i]; // 初始值必须用数组首元素</a:t>
             </a:r>
@@ -26091,10 +26252,10 @@
                 <a:solidFill>
                   <a:srgbClr val="DCDCDC"/>
                 </a:solidFill>
-                <a:latin typeface="Roboto Mono"/>
-                <a:ea typeface="Roboto Mono"/>
-                <a:cs typeface="Roboto Mono"/>
-                <a:sym typeface="Roboto Mono"/>
+                <a:latin typeface="Roboto" panose="02000000000000000000" charset="0"/>
+                <a:ea typeface="Roboto" panose="02000000000000000000" charset="0"/>
+                <a:cs typeface="Roboto" panose="02000000000000000000" charset="0"/>
+                <a:sym typeface="Roboto" panose="02000000000000000000" charset="0"/>
               </a:rPr>
               <a:t>//</a:t>
             </a:r>
@@ -26106,7 +26267,7 @@
                 <a:latin typeface="微软雅黑 Light" panose="020B0502040204020203" charset="-122"/>
                 <a:ea typeface="微软雅黑 Light" panose="020B0502040204020203" charset="-122"/>
                 <a:cs typeface="微软雅黑 Light" panose="020B0502040204020203" charset="-122"/>
-                <a:sym typeface="Roboto Mono"/>
+                <a:sym typeface="Roboto" panose="02000000000000000000" charset="0"/>
               </a:rPr>
               <a:t> 从最后一个下标开始，递减至0</a:t>
             </a:r>
@@ -26118,7 +26279,7 @@
                 <a:latin typeface="微软雅黑 Light" panose="020B0502040204020203" charset="-122"/>
                 <a:ea typeface="微软雅黑 Light" panose="020B0502040204020203" charset="-122"/>
                 <a:cs typeface="微软雅黑 Light" panose="020B0502040204020203" charset="-122"/>
-                <a:sym typeface="Roboto Mono"/>
+                <a:sym typeface="Roboto" panose="02000000000000000000" charset="0"/>
               </a:rPr>
             </a:br>
             <a:r>
@@ -26129,7 +26290,7 @@
                 <a:latin typeface="微软雅黑 Light" panose="020B0502040204020203" charset="-122"/>
                 <a:ea typeface="微软雅黑 Light" panose="020B0502040204020203" charset="-122"/>
                 <a:cs typeface="微软雅黑 Light" panose="020B0502040204020203" charset="-122"/>
-                <a:sym typeface="Roboto Mono"/>
+                <a:sym typeface="Roboto" panose="02000000000000000000" charset="0"/>
               </a:rPr>
               <a:t>for(int i = 5; i &gt;= 0; i--) {</a:t>
             </a:r>
@@ -26141,7 +26302,7 @@
                 <a:latin typeface="微软雅黑 Light" panose="020B0502040204020203" charset="-122"/>
                 <a:ea typeface="微软雅黑 Light" panose="020B0502040204020203" charset="-122"/>
                 <a:cs typeface="微软雅黑 Light" panose="020B0502040204020203" charset="-122"/>
-                <a:sym typeface="Roboto Mono"/>
+                <a:sym typeface="Roboto" panose="02000000000000000000" charset="0"/>
               </a:rPr>
             </a:br>
             <a:r>
@@ -26152,7 +26313,7 @@
                 <a:latin typeface="微软雅黑 Light" panose="020B0502040204020203" charset="-122"/>
                 <a:ea typeface="微软雅黑 Light" panose="020B0502040204020203" charset="-122"/>
                 <a:cs typeface="微软雅黑 Light" panose="020B0502040204020203" charset="-122"/>
-                <a:sym typeface="Roboto Mono"/>
+                <a:sym typeface="Roboto" panose="02000000000000000000" charset="0"/>
               </a:rPr>
               <a:t>cout &lt;&lt; arr[i] &lt;&lt; " "; // 输出顺序：56 23 88 7 45 12</a:t>
             </a:r>
@@ -26344,7 +26505,7 @@
                 <a:latin typeface="微软雅黑 Light" panose="020B0502040204020203" charset="-122"/>
                 <a:ea typeface="微软雅黑 Light" panose="020B0502040204020203" charset="-122"/>
                 <a:cs typeface="微软雅黑 Light" panose="020B0502040204020203" charset="-122"/>
-                <a:sym typeface="Roboto Mono"/>
+                <a:sym typeface="Roboto" panose="02000000000000000000" charset="0"/>
               </a:rPr>
               <a:t>int cnt = 0; // 初始化计数器</a:t>
             </a:r>
@@ -26356,7 +26517,7 @@
                 <a:latin typeface="微软雅黑 Light" panose="020B0502040204020203" charset="-122"/>
                 <a:ea typeface="微软雅黑 Light" panose="020B0502040204020203" charset="-122"/>
                 <a:cs typeface="微软雅黑 Light" panose="020B0502040204020203" charset="-122"/>
-                <a:sym typeface="Roboto Mono"/>
+                <a:sym typeface="Roboto" panose="02000000000000000000" charset="0"/>
               </a:rPr>
             </a:br>
             <a:r>
@@ -26367,7 +26528,7 @@
                 <a:latin typeface="微软雅黑 Light" panose="020B0502040204020203" charset="-122"/>
                 <a:ea typeface="微软雅黑 Light" panose="020B0502040204020203" charset="-122"/>
                 <a:cs typeface="微软雅黑 Light" panose="020B0502040204020203" charset="-122"/>
-                <a:sym typeface="Roboto Mono"/>
+                <a:sym typeface="Roboto" panose="02000000000000000000" charset="0"/>
               </a:rPr>
               <a:t>for(int i = 0; i &lt; 6; i++) {</a:t>
             </a:r>
@@ -26379,7 +26540,7 @@
                 <a:latin typeface="微软雅黑 Light" panose="020B0502040204020203" charset="-122"/>
                 <a:ea typeface="微软雅黑 Light" panose="020B0502040204020203" charset="-122"/>
                 <a:cs typeface="微软雅黑 Light" panose="020B0502040204020203" charset="-122"/>
-                <a:sym typeface="Roboto Mono"/>
+                <a:sym typeface="Roboto" panose="02000000000000000000" charset="0"/>
               </a:rPr>
             </a:br>
             <a:r>
@@ -26390,7 +26551,7 @@
                 <a:latin typeface="微软雅黑 Light" panose="020B0502040204020203" charset="-122"/>
                 <a:ea typeface="微软雅黑 Light" panose="020B0502040204020203" charset="-122"/>
                 <a:cs typeface="微软雅黑 Light" panose="020B0502040204020203" charset="-122"/>
-                <a:sym typeface="Roboto Mono"/>
+                <a:sym typeface="Roboto" panose="02000000000000000000" charset="0"/>
               </a:rPr>
               <a:t>if(arr[i] % 2 == 0) cnt++; // 满足条件则计数+1</a:t>
             </a:r>
@@ -28836,10 +28997,10 @@
                 <a:solidFill>
                   <a:srgbClr val="6A9955"/>
                 </a:solidFill>
-                <a:latin typeface="Roboto Mono"/>
-                <a:ea typeface="Roboto Mono"/>
-                <a:cs typeface="Roboto Mono"/>
-                <a:sym typeface="Roboto Mono"/>
+                <a:latin typeface="Roboto" panose="02000000000000000000" charset="0"/>
+                <a:ea typeface="Roboto" panose="02000000000000000000" charset="0"/>
+                <a:cs typeface="Roboto" panose="02000000000000000000" charset="0"/>
+                <a:sym typeface="Roboto" panose="02000000000000000000" charset="0"/>
               </a:rPr>
               <a:t>// 核心逻辑：行列互换</a:t>
             </a:r>
@@ -28848,10 +29009,10 @@
                 <a:solidFill>
                   <a:srgbClr val="1F2329"/>
                 </a:solidFill>
-                <a:latin typeface="Roboto Mono"/>
-                <a:ea typeface="Roboto Mono"/>
-                <a:cs typeface="Roboto Mono"/>
-                <a:sym typeface="Roboto Mono"/>
+                <a:latin typeface="Roboto" panose="02000000000000000000" charset="0"/>
+                <a:ea typeface="Roboto" panose="02000000000000000000" charset="0"/>
+                <a:cs typeface="Roboto" panose="02000000000000000000" charset="0"/>
+                <a:sym typeface="Roboto" panose="02000000000000000000" charset="0"/>
               </a:rPr>
             </a:br>
             <a:r>
@@ -28859,10 +29020,10 @@
                 <a:solidFill>
                   <a:srgbClr val="CCCCCC"/>
                 </a:solidFill>
-                <a:latin typeface="Roboto Mono"/>
-                <a:ea typeface="Roboto Mono"/>
-                <a:cs typeface="Roboto Mono"/>
-                <a:sym typeface="Roboto Mono"/>
+                <a:latin typeface="Roboto" panose="02000000000000000000" charset="0"/>
+                <a:ea typeface="Roboto" panose="02000000000000000000" charset="0"/>
+                <a:cs typeface="Roboto" panose="02000000000000000000" charset="0"/>
+                <a:sym typeface="Roboto" panose="02000000000000000000" charset="0"/>
               </a:rPr>
               <a:t>for(int i = 0; i &lt; 2; i++) {</a:t>
             </a:r>
@@ -28871,10 +29032,10 @@
                 <a:solidFill>
                   <a:srgbClr val="1F2329"/>
                 </a:solidFill>
-                <a:latin typeface="Roboto Mono"/>
-                <a:ea typeface="Roboto Mono"/>
-                <a:cs typeface="Roboto Mono"/>
-                <a:sym typeface="Roboto Mono"/>
+                <a:latin typeface="Roboto" panose="02000000000000000000" charset="0"/>
+                <a:ea typeface="Roboto" panose="02000000000000000000" charset="0"/>
+                <a:cs typeface="Roboto" panose="02000000000000000000" charset="0"/>
+                <a:sym typeface="Roboto" panose="02000000000000000000" charset="0"/>
               </a:rPr>
             </a:br>
             <a:r>
@@ -28882,10 +29043,10 @@
                 <a:solidFill>
                   <a:srgbClr val="CCCCCC"/>
                 </a:solidFill>
-                <a:latin typeface="Roboto Mono"/>
-                <a:ea typeface="Roboto Mono"/>
-                <a:cs typeface="Roboto Mono"/>
-                <a:sym typeface="Roboto Mono"/>
+                <a:latin typeface="Roboto" panose="02000000000000000000" charset="0"/>
+                <a:ea typeface="Roboto" panose="02000000000000000000" charset="0"/>
+                <a:cs typeface="Roboto" panose="02000000000000000000" charset="0"/>
+                <a:sym typeface="Roboto" panose="02000000000000000000" charset="0"/>
               </a:rPr>
               <a:t>  for(int j = 0; j &lt; 3; j++) {</a:t>
             </a:r>
@@ -28894,10 +29055,10 @@
                 <a:solidFill>
                   <a:srgbClr val="1F2329"/>
                 </a:solidFill>
-                <a:latin typeface="Roboto Mono"/>
-                <a:ea typeface="Roboto Mono"/>
-                <a:cs typeface="Roboto Mono"/>
-                <a:sym typeface="Roboto Mono"/>
+                <a:latin typeface="Roboto" panose="02000000000000000000" charset="0"/>
+                <a:ea typeface="Roboto" panose="02000000000000000000" charset="0"/>
+                <a:cs typeface="Roboto" panose="02000000000000000000" charset="0"/>
+                <a:sym typeface="Roboto" panose="02000000000000000000" charset="0"/>
               </a:rPr>
             </a:br>
             <a:r>
@@ -28905,10 +29066,10 @@
                 <a:solidFill>
                   <a:srgbClr val="DCDCAA"/>
                 </a:solidFill>
-                <a:latin typeface="Roboto Mono"/>
-                <a:ea typeface="Roboto Mono"/>
-                <a:cs typeface="Roboto Mono"/>
-                <a:sym typeface="Roboto Mono"/>
+                <a:latin typeface="Roboto" panose="02000000000000000000" charset="0"/>
+                <a:ea typeface="Roboto" panose="02000000000000000000" charset="0"/>
+                <a:cs typeface="Roboto" panose="02000000000000000000" charset="0"/>
+                <a:sym typeface="Roboto" panose="02000000000000000000" charset="0"/>
               </a:rPr>
               <a:t>    b[j][i] = a[i][j];</a:t>
             </a:r>
@@ -28917,10 +29078,10 @@
                 <a:solidFill>
                   <a:srgbClr val="9CDCFE"/>
                 </a:solidFill>
-                <a:latin typeface="Roboto Mono"/>
-                <a:ea typeface="Roboto Mono"/>
-                <a:cs typeface="Roboto Mono"/>
-                <a:sym typeface="Roboto Mono"/>
+                <a:latin typeface="Roboto" panose="02000000000000000000" charset="0"/>
+                <a:ea typeface="Roboto" panose="02000000000000000000" charset="0"/>
+                <a:cs typeface="Roboto" panose="02000000000000000000" charset="0"/>
+                <a:sym typeface="Roboto" panose="02000000000000000000" charset="0"/>
               </a:rPr>
               <a:t> // 关键：行变列，列变行</a:t>
             </a:r>
@@ -28929,10 +29090,10 @@
                 <a:solidFill>
                   <a:srgbClr val="1F2329"/>
                 </a:solidFill>
-                <a:latin typeface="Roboto Mono"/>
-                <a:ea typeface="Roboto Mono"/>
-                <a:cs typeface="Roboto Mono"/>
-                <a:sym typeface="Roboto Mono"/>
+                <a:latin typeface="Roboto" panose="02000000000000000000" charset="0"/>
+                <a:ea typeface="Roboto" panose="02000000000000000000" charset="0"/>
+                <a:cs typeface="Roboto" panose="02000000000000000000" charset="0"/>
+                <a:sym typeface="Roboto" panose="02000000000000000000" charset="0"/>
               </a:rPr>
             </a:br>
             <a:r>
@@ -28940,10 +29101,10 @@
                 <a:solidFill>
                   <a:srgbClr val="CCCCCC"/>
                 </a:solidFill>
-                <a:latin typeface="Roboto Mono"/>
-                <a:ea typeface="Roboto Mono"/>
-                <a:cs typeface="Roboto Mono"/>
-                <a:sym typeface="Roboto Mono"/>
+                <a:latin typeface="Roboto" panose="02000000000000000000" charset="0"/>
+                <a:ea typeface="Roboto" panose="02000000000000000000" charset="0"/>
+                <a:cs typeface="Roboto" panose="02000000000000000000" charset="0"/>
+                <a:sym typeface="Roboto" panose="02000000000000000000" charset="0"/>
               </a:rPr>
               <a:t>  }</a:t>
             </a:r>
@@ -28952,10 +29113,10 @@
                 <a:solidFill>
                   <a:srgbClr val="1F2329"/>
                 </a:solidFill>
-                <a:latin typeface="Roboto Mono"/>
-                <a:ea typeface="Roboto Mono"/>
-                <a:cs typeface="Roboto Mono"/>
-                <a:sym typeface="Roboto Mono"/>
+                <a:latin typeface="Roboto" panose="02000000000000000000" charset="0"/>
+                <a:ea typeface="Roboto" panose="02000000000000000000" charset="0"/>
+                <a:cs typeface="Roboto" panose="02000000000000000000" charset="0"/>
+                <a:sym typeface="Roboto" panose="02000000000000000000" charset="0"/>
               </a:rPr>
             </a:br>
             <a:r>
@@ -28963,10 +29124,10 @@
                 <a:solidFill>
                   <a:srgbClr val="CCCCCC"/>
                 </a:solidFill>
-                <a:latin typeface="Roboto Mono"/>
-                <a:ea typeface="Roboto Mono"/>
-                <a:cs typeface="Roboto Mono"/>
-                <a:sym typeface="Roboto Mono"/>
+                <a:latin typeface="Roboto" panose="02000000000000000000" charset="0"/>
+                <a:ea typeface="Roboto" panose="02000000000000000000" charset="0"/>
+                <a:cs typeface="Roboto" panose="02000000000000000000" charset="0"/>
+                <a:sym typeface="Roboto" panose="02000000000000000000" charset="0"/>
               </a:rPr>
               <a:t>}</a:t>
             </a:r>
@@ -28975,10 +29136,10 @@
                 <a:solidFill>
                   <a:srgbClr val="1F2329"/>
                 </a:solidFill>
-                <a:latin typeface="Roboto Mono"/>
-                <a:ea typeface="Roboto Mono"/>
-                <a:cs typeface="Roboto Mono"/>
-                <a:sym typeface="Roboto Mono"/>
+                <a:latin typeface="Roboto" panose="02000000000000000000" charset="0"/>
+                <a:ea typeface="Roboto" panose="02000000000000000000" charset="0"/>
+                <a:cs typeface="Roboto" panose="02000000000000000000" charset="0"/>
+                <a:sym typeface="Roboto" panose="02000000000000000000" charset="0"/>
               </a:rPr>
             </a:br>
             <a:r>
@@ -28986,10 +29147,10 @@
                 <a:solidFill>
                   <a:srgbClr val="6A9955"/>
                 </a:solidFill>
-                <a:latin typeface="Roboto Mono"/>
-                <a:ea typeface="Roboto Mono"/>
-                <a:cs typeface="Roboto Mono"/>
-                <a:sym typeface="Roboto Mono"/>
+                <a:latin typeface="Roboto" panose="02000000000000000000" charset="0"/>
+                <a:ea typeface="Roboto" panose="02000000000000000000" charset="0"/>
+                <a:cs typeface="Roboto" panose="02000000000000000000" charset="0"/>
+                <a:sym typeface="Roboto" panose="02000000000000000000" charset="0"/>
               </a:rPr>
               <a:t>// 外层循环控制行，内层控制列，换行在外层</a:t>
             </a:r>
@@ -35459,4 +35620,263 @@
     </a:ext>
   </a:extLst>
 </a:theme>
+</file>
+
+<file path=ppt/theme/theme4.xml><?xml version="1.0" encoding="utf-8"?>
+<a:theme xmlns:a="http://schemas.openxmlformats.org/drawingml/2006/main" name="Office 主题">
+  <a:themeElements>
+    <a:clrScheme name="Office">
+      <a:dk1>
+        <a:sysClr val="windowText" lastClr="000000"/>
+      </a:dk1>
+      <a:lt1>
+        <a:sysClr val="window" lastClr="FFFFFF"/>
+      </a:lt1>
+      <a:dk2>
+        <a:srgbClr val="44546A"/>
+      </a:dk2>
+      <a:lt2>
+        <a:srgbClr val="E7E6E6"/>
+      </a:lt2>
+      <a:accent1>
+        <a:srgbClr val="5B9BD5"/>
+      </a:accent1>
+      <a:accent2>
+        <a:srgbClr val="ED7D31"/>
+      </a:accent2>
+      <a:accent3>
+        <a:srgbClr val="A5A5A5"/>
+      </a:accent3>
+      <a:accent4>
+        <a:srgbClr val="FFC000"/>
+      </a:accent4>
+      <a:accent5>
+        <a:srgbClr val="4472C4"/>
+      </a:accent5>
+      <a:accent6>
+        <a:srgbClr val="70AD47"/>
+      </a:accent6>
+      <a:hlink>
+        <a:srgbClr val="0563C1"/>
+      </a:hlink>
+      <a:folHlink>
+        <a:srgbClr val="954F72"/>
+      </a:folHlink>
+    </a:clrScheme>
+    <a:fontScheme name="Office">
+      <a:majorFont>
+        <a:latin typeface="Calibri Light"/>
+        <a:ea typeface=""/>
+        <a:cs typeface=""/>
+        <a:font script="Jpan" typeface="ＭＳ Ｐゴシック"/>
+        <a:font script="Hang" typeface="맑은 고딕"/>
+        <a:font script="Hans" typeface="宋体"/>
+        <a:font script="Hant" typeface="新細明體"/>
+        <a:font script="Arab" typeface="Times New Roman"/>
+        <a:font script="Hebr" typeface="Times New Roman"/>
+        <a:font script="Thai" typeface="Angsana New"/>
+        <a:font script="Ethi" typeface="Nyala"/>
+        <a:font script="Beng" typeface="Vrinda"/>
+        <a:font script="Gujr" typeface="Shruti"/>
+        <a:font script="Khmr" typeface="MoolBoran"/>
+        <a:font script="Knda" typeface="Tunga"/>
+        <a:font script="Guru" typeface="Raavi"/>
+        <a:font script="Cans" typeface="Euphemia"/>
+        <a:font script="Cher" typeface="Plantagenet Cherokee"/>
+        <a:font script="Yiii" typeface="Microsoft Yi Baiti"/>
+        <a:font script="Tibt" typeface="Microsoft Himalaya"/>
+        <a:font script="Thaa" typeface="MV Boli"/>
+        <a:font script="Deva" typeface="Mangal"/>
+        <a:font script="Telu" typeface="Gautami"/>
+        <a:font script="Taml" typeface="Latha"/>
+        <a:font script="Syrc" typeface="Estrangelo Edessa"/>
+        <a:font script="Orya" typeface="Kalinga"/>
+        <a:font script="Mlym" typeface="Kartika"/>
+        <a:font script="Laoo" typeface="DokChampa"/>
+        <a:font script="Sinh" typeface="Iskoola Pota"/>
+        <a:font script="Mong" typeface="Mongolian Baiti"/>
+        <a:font script="Viet" typeface="Times New Roman"/>
+        <a:font script="Uigh" typeface="Microsoft Uighur"/>
+        <a:font script="Geor" typeface="Sylfaen"/>
+      </a:majorFont>
+      <a:minorFont>
+        <a:latin typeface="Calibri"/>
+        <a:ea typeface=""/>
+        <a:cs typeface=""/>
+        <a:font script="Jpan" typeface="ＭＳ Ｐゴシック"/>
+        <a:font script="Hang" typeface="맑은 고딕"/>
+        <a:font script="Hans" typeface="宋体"/>
+        <a:font script="Hant" typeface="新細明體"/>
+        <a:font script="Arab" typeface="Arial"/>
+        <a:font script="Hebr" typeface="Arial"/>
+        <a:font script="Thai" typeface="Cordia New"/>
+        <a:font script="Ethi" typeface="Nyala"/>
+        <a:font script="Beng" typeface="Vrinda"/>
+        <a:font script="Gujr" typeface="Shruti"/>
+        <a:font script="Khmr" typeface="DaunPenh"/>
+        <a:font script="Knda" typeface="Tunga"/>
+        <a:font script="Guru" typeface="Raavi"/>
+        <a:font script="Cans" typeface="Euphemia"/>
+        <a:font script="Cher" typeface="Plantagenet Cherokee"/>
+        <a:font script="Yiii" typeface="Microsoft Yi Baiti"/>
+        <a:font script="Tibt" typeface="Microsoft Himalaya"/>
+        <a:font script="Thaa" typeface="MV Boli"/>
+        <a:font script="Deva" typeface="Mangal"/>
+        <a:font script="Telu" typeface="Gautami"/>
+        <a:font script="Taml" typeface="Latha"/>
+        <a:font script="Syrc" typeface="Estrangelo Edessa"/>
+        <a:font script="Orya" typeface="Kalinga"/>
+        <a:font script="Mlym" typeface="Kartika"/>
+        <a:font script="Laoo" typeface="DokChampa"/>
+        <a:font script="Sinh" typeface="Iskoola Pota"/>
+        <a:font script="Mong" typeface="Mongolian Baiti"/>
+        <a:font script="Viet" typeface="Arial"/>
+        <a:font script="Uigh" typeface="Microsoft Uighur"/>
+        <a:font script="Geor" typeface="Sylfaen"/>
+      </a:minorFont>
+    </a:fontScheme>
+    <a:fmtScheme name="Office">
+      <a:fillStyleLst>
+        <a:solidFill>
+          <a:schemeClr val="phClr"/>
+        </a:solidFill>
+        <a:gradFill rotWithShape="1">
+          <a:gsLst>
+            <a:gs pos="0">
+              <a:schemeClr val="phClr">
+                <a:lumMod val="110000"/>
+                <a:satMod val="105000"/>
+                <a:tint val="67000"/>
+              </a:schemeClr>
+            </a:gs>
+            <a:gs pos="50000">
+              <a:schemeClr val="phClr">
+                <a:lumMod val="105000"/>
+                <a:satMod val="103000"/>
+                <a:tint val="73000"/>
+              </a:schemeClr>
+            </a:gs>
+            <a:gs pos="100000">
+              <a:schemeClr val="phClr">
+                <a:lumMod val="105000"/>
+                <a:satMod val="109000"/>
+                <a:tint val="81000"/>
+              </a:schemeClr>
+            </a:gs>
+          </a:gsLst>
+          <a:lin ang="5400000" scaled="0"/>
+        </a:gradFill>
+        <a:gradFill rotWithShape="1">
+          <a:gsLst>
+            <a:gs pos="0">
+              <a:schemeClr val="phClr">
+                <a:satMod val="103000"/>
+                <a:lumMod val="102000"/>
+                <a:tint val="94000"/>
+              </a:schemeClr>
+            </a:gs>
+            <a:gs pos="50000">
+              <a:schemeClr val="phClr">
+                <a:satMod val="110000"/>
+                <a:lumMod val="100000"/>
+                <a:shade val="100000"/>
+              </a:schemeClr>
+            </a:gs>
+            <a:gs pos="100000">
+              <a:schemeClr val="phClr">
+                <a:lumMod val="99000"/>
+                <a:satMod val="120000"/>
+                <a:shade val="78000"/>
+              </a:schemeClr>
+            </a:gs>
+          </a:gsLst>
+          <a:lin ang="5400000" scaled="0"/>
+        </a:gradFill>
+      </a:fillStyleLst>
+      <a:lnStyleLst>
+        <a:ln w="6350" cap="flat" cmpd="sng" algn="ctr">
+          <a:solidFill>
+            <a:schemeClr val="phClr"/>
+          </a:solidFill>
+          <a:prstDash val="solid"/>
+          <a:miter lim="800000"/>
+        </a:ln>
+        <a:ln w="12700" cap="flat" cmpd="sng" algn="ctr">
+          <a:solidFill>
+            <a:schemeClr val="phClr"/>
+          </a:solidFill>
+          <a:prstDash val="solid"/>
+          <a:miter lim="800000"/>
+        </a:ln>
+        <a:ln w="19050" cap="flat" cmpd="sng" algn="ctr">
+          <a:solidFill>
+            <a:schemeClr val="phClr"/>
+          </a:solidFill>
+          <a:prstDash val="solid"/>
+          <a:miter lim="800000"/>
+        </a:ln>
+      </a:lnStyleLst>
+      <a:effectStyleLst>
+        <a:effectStyle>
+          <a:effectLst/>
+        </a:effectStyle>
+        <a:effectStyle>
+          <a:effectLst/>
+        </a:effectStyle>
+        <a:effectStyle>
+          <a:effectLst>
+            <a:outerShdw blurRad="57150" dist="19050" dir="5400000" algn="ctr" rotWithShape="0">
+              <a:srgbClr val="000000">
+                <a:alpha val="63000"/>
+              </a:srgbClr>
+            </a:outerShdw>
+          </a:effectLst>
+        </a:effectStyle>
+      </a:effectStyleLst>
+      <a:bgFillStyleLst>
+        <a:solidFill>
+          <a:schemeClr val="phClr"/>
+        </a:solidFill>
+        <a:solidFill>
+          <a:schemeClr val="phClr">
+            <a:tint val="95000"/>
+            <a:satMod val="170000"/>
+          </a:schemeClr>
+        </a:solidFill>
+        <a:gradFill rotWithShape="1">
+          <a:gsLst>
+            <a:gs pos="0">
+              <a:schemeClr val="phClr">
+                <a:tint val="93000"/>
+                <a:satMod val="150000"/>
+                <a:shade val="98000"/>
+                <a:lumMod val="102000"/>
+              </a:schemeClr>
+            </a:gs>
+            <a:gs pos="50000">
+              <a:schemeClr val="phClr">
+                <a:tint val="98000"/>
+                <a:satMod val="130000"/>
+                <a:shade val="90000"/>
+                <a:lumMod val="103000"/>
+              </a:schemeClr>
+            </a:gs>
+            <a:gs pos="100000">
+              <a:schemeClr val="phClr">
+                <a:shade val="63000"/>
+                <a:satMod val="120000"/>
+              </a:schemeClr>
+            </a:gs>
+          </a:gsLst>
+          <a:lin ang="5400000" scaled="0"/>
+        </a:gradFill>
+      </a:bgFillStyleLst>
+    </a:fmtScheme>
+  </a:themeElements>
+  <a:extLst>
+    <a:ext uri="{05A4C25C-085E-4340-85A3-A5531E510DB2}">
+      <thm15:themeFamily xmlns:thm15="http://schemas.microsoft.com/office/thememl/2012/main" name="Office Theme" id="{62F939B6-93AF-4DB8-9C6B-D6C7DFDC589F}" vid="{4A3C46E8-61CC-4603-A589-7422A47A8E4A}"/>
+    </a:ext>
+  </a:extLst>
+</a:theme>
 </file>